--- a/public/fun/pack/pptx/news/카드뉴스_08_계절안부_처마밑제비집.pptx
+++ b/public/fun/pack/pptx/news/카드뉴스_08_계절안부_처마밑제비집.pptx
@@ -3348,7 +3348,7 @@
             <a:r>
               <a:rPr sz="3000" b="1" i="0">
                 <a:solidFill>
-                  <a:srgbClr val="16263B"/>
+                  <a:srgbClr val="1D4072"/>
                 </a:solidFill>
               </a:rPr>
               <a:t>봄비 오는 날 우산 챙기셨나요</a:t>
@@ -3386,7 +3386,7 @@
             <a:r>
               <a:rPr sz="1500" b="0" i="1">
                 <a:solidFill>
-                  <a:srgbClr val="16263B"/>
+                  <a:srgbClr val="1D4072"/>
                 </a:solidFill>
               </a:rPr>
               <a:t>옆으로 넘겨 보세요 →</a:t>
@@ -3446,7 +3446,7 @@
     <p:bg>
       <p:bgPr>
         <a:solidFill>
-          <a:srgbClr val="F0F4F9"/>
+          <a:srgbClr val="F3F7FC"/>
         </a:solidFill>
         <a:effectLst/>
       </p:bgPr>
@@ -3476,7 +3476,7 @@
             </a:avLst>
           </a:prstGeom>
           <a:solidFill>
-            <a:srgbClr val="D1DEF0"/>
+            <a:srgbClr val="D4E3F7"/>
           </a:solidFill>
           <a:ln>
             <a:noFill/>
@@ -3520,7 +3520,7 @@
             <a:r>
               <a:rPr sz="2600" b="1" i="0">
                 <a:solidFill>
-                  <a:srgbClr val="16263B"/>
+                  <a:srgbClr val="1D4072"/>
                 </a:solidFill>
               </a:rPr>
               <a:t>겉옷 한 벌 챙기세요</a:t>
@@ -3558,7 +3558,7 @@
             <a:r>
               <a:rPr sz="6600" b="1" i="0">
                 <a:solidFill>
-                  <a:srgbClr val="2A476F"/>
+                  <a:srgbClr val="4981D0"/>
                 </a:solidFill>
               </a:rPr>
               <a:t>01</a:t>
@@ -3656,7 +3656,7 @@
     <p:bg>
       <p:bgPr>
         <a:solidFill>
-          <a:srgbClr val="F0F4F9"/>
+          <a:srgbClr val="F3F7FC"/>
         </a:solidFill>
         <a:effectLst/>
       </p:bgPr>
@@ -3686,7 +3686,7 @@
             </a:avLst>
           </a:prstGeom>
           <a:solidFill>
-            <a:srgbClr val="D1DEF0"/>
+            <a:srgbClr val="D4E3F7"/>
           </a:solidFill>
           <a:ln>
             <a:noFill/>
@@ -3730,7 +3730,7 @@
             <a:r>
               <a:rPr sz="2600" b="1" i="0">
                 <a:solidFill>
-                  <a:srgbClr val="16263B"/>
+                  <a:srgbClr val="1D4072"/>
                 </a:solidFill>
               </a:rPr>
               <a:t>계절 인사 한 줄 보내기</a:t>
@@ -3768,7 +3768,7 @@
             <a:r>
               <a:rPr sz="6600" b="1" i="0">
                 <a:solidFill>
-                  <a:srgbClr val="2A476F"/>
+                  <a:srgbClr val="4981D0"/>
                 </a:solidFill>
               </a:rPr>
               <a:t>02</a:t>
@@ -3866,7 +3866,7 @@
     <p:bg>
       <p:bgPr>
         <a:solidFill>
-          <a:srgbClr val="F0F4F9"/>
+          <a:srgbClr val="F3F7FC"/>
         </a:solidFill>
         <a:effectLst/>
       </p:bgPr>
@@ -3896,7 +3896,7 @@
             </a:avLst>
           </a:prstGeom>
           <a:solidFill>
-            <a:srgbClr val="D1DEF0"/>
+            <a:srgbClr val="D4E3F7"/>
           </a:solidFill>
           <a:ln>
             <a:noFill/>
@@ -3940,7 +3940,7 @@
             <a:r>
               <a:rPr sz="2600" b="1" i="0">
                 <a:solidFill>
-                  <a:srgbClr val="16263B"/>
+                  <a:srgbClr val="1D4072"/>
                 </a:solidFill>
               </a:rPr>
               <a:t>제철 음식으로 기운 채우기</a:t>
@@ -3978,7 +3978,7 @@
             <a:r>
               <a:rPr sz="6600" b="1" i="0">
                 <a:solidFill>
-                  <a:srgbClr val="2A476F"/>
+                  <a:srgbClr val="4981D0"/>
                 </a:solidFill>
               </a:rPr>
               <a:t>03</a:t>
@@ -4076,7 +4076,7 @@
     <p:bg>
       <p:bgPr>
         <a:solidFill>
-          <a:srgbClr val="F0F4F9"/>
+          <a:srgbClr val="F3F7FC"/>
         </a:solidFill>
         <a:effectLst/>
       </p:bgPr>
@@ -4106,7 +4106,7 @@
             </a:avLst>
           </a:prstGeom>
           <a:solidFill>
-            <a:srgbClr val="D1DEF0"/>
+            <a:srgbClr val="D4E3F7"/>
           </a:solidFill>
           <a:ln>
             <a:noFill/>
@@ -4150,7 +4150,7 @@
             <a:r>
               <a:rPr sz="2600" b="1" i="0">
                 <a:solidFill>
-                  <a:srgbClr val="16263B"/>
+                  <a:srgbClr val="1D4072"/>
                 </a:solidFill>
               </a:rPr>
               <a:t>창문 열고 환기하기</a:t>
@@ -4188,7 +4188,7 @@
             <a:r>
               <a:rPr sz="6600" b="1" i="0">
                 <a:solidFill>
-                  <a:srgbClr val="2A476F"/>
+                  <a:srgbClr val="4981D0"/>
                 </a:solidFill>
               </a:rPr>
               <a:t>04</a:t>
@@ -4286,7 +4286,7 @@
     <p:bg>
       <p:bgPr>
         <a:solidFill>
-          <a:srgbClr val="F0F4F9"/>
+          <a:srgbClr val="F3F7FC"/>
         </a:solidFill>
         <a:effectLst/>
       </p:bgPr>
@@ -4316,7 +4316,7 @@
             </a:avLst>
           </a:prstGeom>
           <a:solidFill>
-            <a:srgbClr val="D1DEF0"/>
+            <a:srgbClr val="D4E3F7"/>
           </a:solidFill>
           <a:ln>
             <a:noFill/>
@@ -4360,7 +4360,7 @@
             <a:r>
               <a:rPr sz="2600" b="1" i="0">
                 <a:solidFill>
-                  <a:srgbClr val="16263B"/>
+                  <a:srgbClr val="1D4072"/>
                 </a:solidFill>
               </a:rPr>
               <a:t>계절 사진 한 장 남기기</a:t>
@@ -4398,7 +4398,7 @@
             <a:r>
               <a:rPr sz="6600" b="1" i="0">
                 <a:solidFill>
-                  <a:srgbClr val="2A476F"/>
+                  <a:srgbClr val="4981D0"/>
                 </a:solidFill>
               </a:rPr>
               <a:t>05</a:t>
@@ -4554,7 +4554,7 @@
             <a:r>
               <a:rPr sz="2800" b="1" i="0">
                 <a:solidFill>
-                  <a:srgbClr val="16263B"/>
+                  <a:srgbClr val="1D4072"/>
                 </a:solidFill>
               </a:rPr>
               <a:t>저장해 두고 필요할 때 꺼내 보세요</a:t>
@@ -4592,7 +4592,7 @@
             <a:r>
               <a:rPr sz="1500" b="0" i="1">
                 <a:solidFill>
-                  <a:srgbClr val="16263B"/>
+                  <a:srgbClr val="1D4072"/>
                 </a:solidFill>
               </a:rPr>
               <a:t>마음에 들면 공유해 주세요</a:t>
@@ -4657,34 +4657,34 @@
         <a:sysClr val="window" lastClr="FFFFFF"/>
       </a:lt1>
       <a:dk2>
-        <a:srgbClr val="16263B"/>
+        <a:srgbClr val="1D4072"/>
       </a:dk2>
       <a:lt2>
-        <a:srgbClr val="F0F4F9"/>
+        <a:srgbClr val="F3F7FC"/>
       </a:lt2>
       <a:accent1>
-        <a:srgbClr val="2A476F"/>
+        <a:srgbClr val="4981D0"/>
       </a:accent1>
       <a:accent2>
-        <a:srgbClr val="91423B"/>
+        <a:srgbClr val="339941"/>
       </a:accent2>
       <a:accent3>
-        <a:srgbClr val="16263B"/>
+        <a:srgbClr val="1D4072"/>
       </a:accent3>
       <a:accent4>
-        <a:srgbClr val="D1DEF0"/>
+        <a:srgbClr val="D4E3F7"/>
       </a:accent4>
       <a:accent5>
-        <a:srgbClr val="5E4455"/>
+        <a:srgbClr val="3E8D88"/>
       </a:accent5>
       <a:accent6>
-        <a:srgbClr val="737D89"/>
+        <a:srgbClr val="778CAA"/>
       </a:accent6>
       <a:hlink>
-        <a:srgbClr val="2A476F"/>
+        <a:srgbClr val="4981D0"/>
       </a:hlink>
       <a:folHlink>
-        <a:srgbClr val="16263B"/>
+        <a:srgbClr val="1D4072"/>
       </a:folHlink>
     </a:clrScheme>
     <a:fontScheme name="Office">
